--- a/assets/img/publication_preview/Janus.pptx
+++ b/assets/img/publication_preview/Janus.pptx
@@ -10,14 +10,14 @@
   <p:sldIdLst>
     <p:sldId id="257" r:id="rId2"/>
   </p:sldIdLst>
-  <p:sldSz cx="6350000" cy="2419350"/>
+  <p:sldSz cx="4819650" cy="4819650"/>
   <p:notesSz cx="7772400" cy="10058400"/>
   <p:defaultTextStyle>
     <a:defPPr>
       <a:defRPr lang="ko-KR"/>
     </a:defPPr>
-    <a:lvl1pPr marL="0" algn="l" defTabSz="515364" rtl="0" eaLnBrk="1" latinLnBrk="1" hangingPunct="1">
-      <a:defRPr sz="1015" kern="1200">
+    <a:lvl1pPr marL="0" algn="l" defTabSz="515345" rtl="0" eaLnBrk="1" latinLnBrk="1" hangingPunct="1">
+      <a:defRPr sz="1014" kern="1200">
         <a:solidFill>
           <a:schemeClr val="tx1"/>
         </a:solidFill>
@@ -26,8 +26,8 @@
         <a:cs typeface="+mn-cs"/>
       </a:defRPr>
     </a:lvl1pPr>
-    <a:lvl2pPr marL="257682" algn="l" defTabSz="515364" rtl="0" eaLnBrk="1" latinLnBrk="1" hangingPunct="1">
-      <a:defRPr sz="1015" kern="1200">
+    <a:lvl2pPr marL="257674" algn="l" defTabSz="515345" rtl="0" eaLnBrk="1" latinLnBrk="1" hangingPunct="1">
+      <a:defRPr sz="1014" kern="1200">
         <a:solidFill>
           <a:schemeClr val="tx1"/>
         </a:solidFill>
@@ -36,8 +36,8 @@
         <a:cs typeface="+mn-cs"/>
       </a:defRPr>
     </a:lvl2pPr>
-    <a:lvl3pPr marL="515364" algn="l" defTabSz="515364" rtl="0" eaLnBrk="1" latinLnBrk="1" hangingPunct="1">
-      <a:defRPr sz="1015" kern="1200">
+    <a:lvl3pPr marL="515345" algn="l" defTabSz="515345" rtl="0" eaLnBrk="1" latinLnBrk="1" hangingPunct="1">
+      <a:defRPr sz="1014" kern="1200">
         <a:solidFill>
           <a:schemeClr val="tx1"/>
         </a:solidFill>
@@ -46,8 +46,8 @@
         <a:cs typeface="+mn-cs"/>
       </a:defRPr>
     </a:lvl3pPr>
-    <a:lvl4pPr marL="773046" algn="l" defTabSz="515364" rtl="0" eaLnBrk="1" latinLnBrk="1" hangingPunct="1">
-      <a:defRPr sz="1015" kern="1200">
+    <a:lvl4pPr marL="773019" algn="l" defTabSz="515345" rtl="0" eaLnBrk="1" latinLnBrk="1" hangingPunct="1">
+      <a:defRPr sz="1014" kern="1200">
         <a:solidFill>
           <a:schemeClr val="tx1"/>
         </a:solidFill>
@@ -56,8 +56,8 @@
         <a:cs typeface="+mn-cs"/>
       </a:defRPr>
     </a:lvl4pPr>
-    <a:lvl5pPr marL="1030728" algn="l" defTabSz="515364" rtl="0" eaLnBrk="1" latinLnBrk="1" hangingPunct="1">
-      <a:defRPr sz="1015" kern="1200">
+    <a:lvl5pPr marL="1030693" algn="l" defTabSz="515345" rtl="0" eaLnBrk="1" latinLnBrk="1" hangingPunct="1">
+      <a:defRPr sz="1014" kern="1200">
         <a:solidFill>
           <a:schemeClr val="tx1"/>
         </a:solidFill>
@@ -66,8 +66,8 @@
         <a:cs typeface="+mn-cs"/>
       </a:defRPr>
     </a:lvl5pPr>
-    <a:lvl6pPr marL="1288410" algn="l" defTabSz="515364" rtl="0" eaLnBrk="1" latinLnBrk="1" hangingPunct="1">
-      <a:defRPr sz="1015" kern="1200">
+    <a:lvl6pPr marL="1288365" algn="l" defTabSz="515345" rtl="0" eaLnBrk="1" latinLnBrk="1" hangingPunct="1">
+      <a:defRPr sz="1014" kern="1200">
         <a:solidFill>
           <a:schemeClr val="tx1"/>
         </a:solidFill>
@@ -76,8 +76,8 @@
         <a:cs typeface="+mn-cs"/>
       </a:defRPr>
     </a:lvl6pPr>
-    <a:lvl7pPr marL="1546092" algn="l" defTabSz="515364" rtl="0" eaLnBrk="1" latinLnBrk="1" hangingPunct="1">
-      <a:defRPr sz="1015" kern="1200">
+    <a:lvl7pPr marL="1546038" algn="l" defTabSz="515345" rtl="0" eaLnBrk="1" latinLnBrk="1" hangingPunct="1">
+      <a:defRPr sz="1014" kern="1200">
         <a:solidFill>
           <a:schemeClr val="tx1"/>
         </a:solidFill>
@@ -86,8 +86,8 @@
         <a:cs typeface="+mn-cs"/>
       </a:defRPr>
     </a:lvl7pPr>
-    <a:lvl8pPr marL="1803774" algn="l" defTabSz="515364" rtl="0" eaLnBrk="1" latinLnBrk="1" hangingPunct="1">
-      <a:defRPr sz="1015" kern="1200">
+    <a:lvl8pPr marL="1803710" algn="l" defTabSz="515345" rtl="0" eaLnBrk="1" latinLnBrk="1" hangingPunct="1">
+      <a:defRPr sz="1014" kern="1200">
         <a:solidFill>
           <a:schemeClr val="tx1"/>
         </a:solidFill>
@@ -96,8 +96,8 @@
         <a:cs typeface="+mn-cs"/>
       </a:defRPr>
     </a:lvl8pPr>
-    <a:lvl9pPr marL="2061456" algn="l" defTabSz="515364" rtl="0" eaLnBrk="1" latinLnBrk="1" hangingPunct="1">
-      <a:defRPr sz="1015" kern="1200">
+    <a:lvl9pPr marL="2061384" algn="l" defTabSz="515345" rtl="0" eaLnBrk="1" latinLnBrk="1" hangingPunct="1">
+      <a:defRPr sz="1014" kern="1200">
         <a:solidFill>
           <a:schemeClr val="tx1"/>
         </a:solidFill>
@@ -215,8 +215,8 @@
         </p:nvSpPr>
         <p:spPr>
           <a:xfrm>
-            <a:off x="-566738" y="1257300"/>
-            <a:ext cx="8905876" cy="3394075"/>
+            <a:off x="2189163" y="1257300"/>
+            <a:ext cx="3394075" cy="3394075"/>
           </a:xfrm>
           <a:prstGeom prst="rect">
             <a:avLst/>
@@ -370,8 +370,8 @@
   </p:cSld>
   <p:clrMap bg1="lt1" tx1="dk1" bg2="lt2" tx2="dk2" accent1="accent1" accent2="accent2" accent3="accent3" accent4="accent4" accent5="accent5" accent6="accent6" hlink="hlink" folHlink="folHlink"/>
   <p:notesStyle>
-    <a:lvl1pPr marL="0" algn="l" defTabSz="763615" rtl="0" eaLnBrk="1" latinLnBrk="1" hangingPunct="1">
-      <a:defRPr sz="1002" kern="1200">
+    <a:lvl1pPr marL="0" algn="l" defTabSz="763589" rtl="0" eaLnBrk="1" latinLnBrk="1" hangingPunct="1">
+      <a:defRPr sz="1003" kern="1200">
         <a:solidFill>
           <a:schemeClr val="tx1"/>
         </a:solidFill>
@@ -380,8 +380,8 @@
         <a:cs typeface="+mn-cs"/>
       </a:defRPr>
     </a:lvl1pPr>
-    <a:lvl2pPr marL="381808" algn="l" defTabSz="763615" rtl="0" eaLnBrk="1" latinLnBrk="1" hangingPunct="1">
-      <a:defRPr sz="1002" kern="1200">
+    <a:lvl2pPr marL="381794" algn="l" defTabSz="763589" rtl="0" eaLnBrk="1" latinLnBrk="1" hangingPunct="1">
+      <a:defRPr sz="1003" kern="1200">
         <a:solidFill>
           <a:schemeClr val="tx1"/>
         </a:solidFill>
@@ -390,8 +390,8 @@
         <a:cs typeface="+mn-cs"/>
       </a:defRPr>
     </a:lvl2pPr>
-    <a:lvl3pPr marL="763615" algn="l" defTabSz="763615" rtl="0" eaLnBrk="1" latinLnBrk="1" hangingPunct="1">
-      <a:defRPr sz="1002" kern="1200">
+    <a:lvl3pPr marL="763589" algn="l" defTabSz="763589" rtl="0" eaLnBrk="1" latinLnBrk="1" hangingPunct="1">
+      <a:defRPr sz="1003" kern="1200">
         <a:solidFill>
           <a:schemeClr val="tx1"/>
         </a:solidFill>
@@ -400,8 +400,8 @@
         <a:cs typeface="+mn-cs"/>
       </a:defRPr>
     </a:lvl3pPr>
-    <a:lvl4pPr marL="1145423" algn="l" defTabSz="763615" rtl="0" eaLnBrk="1" latinLnBrk="1" hangingPunct="1">
-      <a:defRPr sz="1002" kern="1200">
+    <a:lvl4pPr marL="1145383" algn="l" defTabSz="763589" rtl="0" eaLnBrk="1" latinLnBrk="1" hangingPunct="1">
+      <a:defRPr sz="1003" kern="1200">
         <a:solidFill>
           <a:schemeClr val="tx1"/>
         </a:solidFill>
@@ -410,8 +410,8 @@
         <a:cs typeface="+mn-cs"/>
       </a:defRPr>
     </a:lvl4pPr>
-    <a:lvl5pPr marL="1527231" algn="l" defTabSz="763615" rtl="0" eaLnBrk="1" latinLnBrk="1" hangingPunct="1">
-      <a:defRPr sz="1002" kern="1200">
+    <a:lvl5pPr marL="1527177" algn="l" defTabSz="763589" rtl="0" eaLnBrk="1" latinLnBrk="1" hangingPunct="1">
+      <a:defRPr sz="1003" kern="1200">
         <a:solidFill>
           <a:schemeClr val="tx1"/>
         </a:solidFill>
@@ -420,8 +420,8 @@
         <a:cs typeface="+mn-cs"/>
       </a:defRPr>
     </a:lvl5pPr>
-    <a:lvl6pPr marL="1909039" algn="l" defTabSz="763615" rtl="0" eaLnBrk="1" latinLnBrk="1" hangingPunct="1">
-      <a:defRPr sz="1002" kern="1200">
+    <a:lvl6pPr marL="1908973" algn="l" defTabSz="763589" rtl="0" eaLnBrk="1" latinLnBrk="1" hangingPunct="1">
+      <a:defRPr sz="1003" kern="1200">
         <a:solidFill>
           <a:schemeClr val="tx1"/>
         </a:solidFill>
@@ -430,8 +430,8 @@
         <a:cs typeface="+mn-cs"/>
       </a:defRPr>
     </a:lvl6pPr>
-    <a:lvl7pPr marL="2290846" algn="l" defTabSz="763615" rtl="0" eaLnBrk="1" latinLnBrk="1" hangingPunct="1">
-      <a:defRPr sz="1002" kern="1200">
+    <a:lvl7pPr marL="2290766" algn="l" defTabSz="763589" rtl="0" eaLnBrk="1" latinLnBrk="1" hangingPunct="1">
+      <a:defRPr sz="1003" kern="1200">
         <a:solidFill>
           <a:schemeClr val="tx1"/>
         </a:solidFill>
@@ -440,8 +440,8 @@
         <a:cs typeface="+mn-cs"/>
       </a:defRPr>
     </a:lvl7pPr>
-    <a:lvl8pPr marL="2672654" algn="l" defTabSz="763615" rtl="0" eaLnBrk="1" latinLnBrk="1" hangingPunct="1">
-      <a:defRPr sz="1002" kern="1200">
+    <a:lvl8pPr marL="2672561" algn="l" defTabSz="763589" rtl="0" eaLnBrk="1" latinLnBrk="1" hangingPunct="1">
+      <a:defRPr sz="1003" kern="1200">
         <a:solidFill>
           <a:schemeClr val="tx1"/>
         </a:solidFill>
@@ -450,8 +450,8 @@
         <a:cs typeface="+mn-cs"/>
       </a:defRPr>
     </a:lvl8pPr>
-    <a:lvl9pPr marL="3054462" algn="l" defTabSz="763615" rtl="0" eaLnBrk="1" latinLnBrk="1" hangingPunct="1">
-      <a:defRPr sz="1002" kern="1200">
+    <a:lvl9pPr marL="3054355" algn="l" defTabSz="763589" rtl="0" eaLnBrk="1" latinLnBrk="1" hangingPunct="1">
+      <a:defRPr sz="1003" kern="1200">
         <a:solidFill>
           <a:schemeClr val="tx1"/>
         </a:solidFill>
@@ -493,8 +493,8 @@
         </p:nvSpPr>
         <p:spPr>
           <a:xfrm>
-            <a:off x="-566738" y="1257300"/>
-            <a:ext cx="8905876" cy="3394075"/>
+            <a:off x="2189163" y="1257300"/>
+            <a:ext cx="3394075" cy="3394075"/>
           </a:xfrm>
         </p:spPr>
       </p:sp>
@@ -607,8 +607,8 @@
         </p:nvSpPr>
         <p:spPr>
           <a:xfrm>
-            <a:off x="317509" y="96522"/>
-            <a:ext cx="5714748" cy="403860"/>
+            <a:off x="240989" y="192284"/>
+            <a:ext cx="4337494" cy="804540"/>
           </a:xfrm>
           <a:prstGeom prst="rect">
             <a:avLst/>
@@ -619,7 +619,7 @@
           <a:lstStyle/>
           <a:p>
             <a:pPr algn="ctr"/>
-            <a:endParaRPr lang="en-US" sz="5060" b="0" strike="noStrike" spc="-1">
+            <a:endParaRPr lang="en-US" sz="5061" b="0" strike="noStrike" spc="-1">
               <a:latin typeface="Arial"/>
             </a:endParaRPr>
           </a:p>
@@ -637,8 +637,8 @@
         </p:nvSpPr>
         <p:spPr>
           <a:xfrm>
-            <a:off x="317509" y="566045"/>
-            <a:ext cx="5714748" cy="669163"/>
+            <a:off x="240989" y="1127639"/>
+            <a:ext cx="4337494" cy="1333057"/>
           </a:xfrm>
           <a:prstGeom prst="rect">
             <a:avLst/>
@@ -668,8 +668,8 @@
         </p:nvSpPr>
         <p:spPr>
           <a:xfrm>
-            <a:off x="317509" y="1298961"/>
-            <a:ext cx="5714748" cy="669163"/>
+            <a:off x="240989" y="2587700"/>
+            <a:ext cx="4337494" cy="1333057"/>
           </a:xfrm>
           <a:prstGeom prst="rect">
             <a:avLst/>
@@ -724,8 +724,8 @@
         </p:nvSpPr>
         <p:spPr>
           <a:xfrm>
-            <a:off x="317509" y="96522"/>
-            <a:ext cx="5714748" cy="403860"/>
+            <a:off x="240989" y="192284"/>
+            <a:ext cx="4337494" cy="804540"/>
           </a:xfrm>
           <a:prstGeom prst="rect">
             <a:avLst/>
@@ -736,7 +736,7 @@
           <a:lstStyle/>
           <a:p>
             <a:pPr algn="ctr"/>
-            <a:endParaRPr lang="en-US" sz="5060" b="0" strike="noStrike" spc="-1">
+            <a:endParaRPr lang="en-US" sz="5061" b="0" strike="noStrike" spc="-1">
               <a:latin typeface="Arial"/>
             </a:endParaRPr>
           </a:p>
@@ -754,8 +754,8 @@
         </p:nvSpPr>
         <p:spPr>
           <a:xfrm>
-            <a:off x="317504" y="566045"/>
-            <a:ext cx="2788753" cy="669163"/>
+            <a:off x="240988" y="1127639"/>
+            <a:ext cx="2116664" cy="1333057"/>
           </a:xfrm>
           <a:prstGeom prst="rect">
             <a:avLst/>
@@ -785,8 +785,8 @@
         </p:nvSpPr>
         <p:spPr>
           <a:xfrm>
-            <a:off x="3246006" y="566045"/>
-            <a:ext cx="2788753" cy="669163"/>
+            <a:off x="2463722" y="1127639"/>
+            <a:ext cx="2116664" cy="1333057"/>
           </a:xfrm>
           <a:prstGeom prst="rect">
             <a:avLst/>
@@ -816,8 +816,8 @@
         </p:nvSpPr>
         <p:spPr>
           <a:xfrm>
-            <a:off x="317504" y="1298961"/>
-            <a:ext cx="2788753" cy="669163"/>
+            <a:off x="240988" y="2587700"/>
+            <a:ext cx="2116664" cy="1333057"/>
           </a:xfrm>
           <a:prstGeom prst="rect">
             <a:avLst/>
@@ -847,8 +847,8 @@
         </p:nvSpPr>
         <p:spPr>
           <a:xfrm>
-            <a:off x="3246006" y="1298961"/>
-            <a:ext cx="2788753" cy="669163"/>
+            <a:off x="2463722" y="2587700"/>
+            <a:ext cx="2116664" cy="1333057"/>
           </a:xfrm>
           <a:prstGeom prst="rect">
             <a:avLst/>
@@ -903,8 +903,8 @@
         </p:nvSpPr>
         <p:spPr>
           <a:xfrm>
-            <a:off x="317509" y="96522"/>
-            <a:ext cx="5714748" cy="403860"/>
+            <a:off x="240989" y="192284"/>
+            <a:ext cx="4337494" cy="804540"/>
           </a:xfrm>
           <a:prstGeom prst="rect">
             <a:avLst/>
@@ -915,7 +915,7 @@
           <a:lstStyle/>
           <a:p>
             <a:pPr algn="ctr"/>
-            <a:endParaRPr lang="en-US" sz="5060" b="0" strike="noStrike" spc="-1">
+            <a:endParaRPr lang="en-US" sz="5061" b="0" strike="noStrike" spc="-1">
               <a:latin typeface="Arial"/>
             </a:endParaRPr>
           </a:p>
@@ -933,8 +933,8 @@
         </p:nvSpPr>
         <p:spPr>
           <a:xfrm>
-            <a:off x="317500" y="566045"/>
-            <a:ext cx="1840000" cy="669163"/>
+            <a:off x="240982" y="1127639"/>
+            <a:ext cx="1396560" cy="1333057"/>
           </a:xfrm>
           <a:prstGeom prst="rect">
             <a:avLst/>
@@ -964,8 +964,8 @@
         </p:nvSpPr>
         <p:spPr>
           <a:xfrm>
-            <a:off x="2249750" y="566045"/>
-            <a:ext cx="1840000" cy="669163"/>
+            <a:off x="1707561" y="1127639"/>
+            <a:ext cx="1396560" cy="1333057"/>
           </a:xfrm>
           <a:prstGeom prst="rect">
             <a:avLst/>
@@ -995,8 +995,8 @@
         </p:nvSpPr>
         <p:spPr>
           <a:xfrm>
-            <a:off x="4182000" y="566045"/>
-            <a:ext cx="1840000" cy="669163"/>
+            <a:off x="3174138" y="1127639"/>
+            <a:ext cx="1396560" cy="1333057"/>
           </a:xfrm>
           <a:prstGeom prst="rect">
             <a:avLst/>
@@ -1026,8 +1026,8 @@
         </p:nvSpPr>
         <p:spPr>
           <a:xfrm>
-            <a:off x="317500" y="1298961"/>
-            <a:ext cx="1840000" cy="669163"/>
+            <a:off x="240982" y="2587700"/>
+            <a:ext cx="1396560" cy="1333057"/>
           </a:xfrm>
           <a:prstGeom prst="rect">
             <a:avLst/>
@@ -1057,8 +1057,8 @@
         </p:nvSpPr>
         <p:spPr>
           <a:xfrm>
-            <a:off x="2249750" y="1298961"/>
-            <a:ext cx="1840000" cy="669163"/>
+            <a:off x="1707561" y="2587700"/>
+            <a:ext cx="1396560" cy="1333057"/>
           </a:xfrm>
           <a:prstGeom prst="rect">
             <a:avLst/>
@@ -1088,8 +1088,8 @@
         </p:nvSpPr>
         <p:spPr>
           <a:xfrm>
-            <a:off x="4182000" y="1298961"/>
-            <a:ext cx="1840000" cy="669163"/>
+            <a:off x="3174138" y="2587700"/>
+            <a:ext cx="1396560" cy="1333057"/>
           </a:xfrm>
           <a:prstGeom prst="rect">
             <a:avLst/>
@@ -1144,8 +1144,8 @@
         </p:nvSpPr>
         <p:spPr>
           <a:xfrm>
-            <a:off x="317509" y="96522"/>
-            <a:ext cx="5714748" cy="403860"/>
+            <a:off x="240989" y="192284"/>
+            <a:ext cx="4337494" cy="804540"/>
           </a:xfrm>
           <a:prstGeom prst="rect">
             <a:avLst/>
@@ -1156,7 +1156,7 @@
           <a:lstStyle/>
           <a:p>
             <a:pPr algn="ctr"/>
-            <a:endParaRPr lang="en-US" sz="5060" b="0" strike="noStrike" spc="-1">
+            <a:endParaRPr lang="en-US" sz="5061" b="0" strike="noStrike" spc="-1">
               <a:latin typeface="Arial"/>
             </a:endParaRPr>
           </a:p>
@@ -1174,8 +1174,8 @@
         </p:nvSpPr>
         <p:spPr>
           <a:xfrm>
-            <a:off x="317509" y="566042"/>
-            <a:ext cx="5714748" cy="1403096"/>
+            <a:off x="240989" y="1127627"/>
+            <a:ext cx="4337494" cy="2795144"/>
           </a:xfrm>
           <a:prstGeom prst="rect">
             <a:avLst/>
@@ -1229,8 +1229,8 @@
         </p:nvSpPr>
         <p:spPr>
           <a:xfrm>
-            <a:off x="317509" y="96522"/>
-            <a:ext cx="5714748" cy="403860"/>
+            <a:off x="240989" y="192284"/>
+            <a:ext cx="4337494" cy="804540"/>
           </a:xfrm>
           <a:prstGeom prst="rect">
             <a:avLst/>
@@ -1241,7 +1241,7 @@
           <a:lstStyle/>
           <a:p>
             <a:pPr algn="ctr"/>
-            <a:endParaRPr lang="en-US" sz="5060" b="0" strike="noStrike" spc="-1">
+            <a:endParaRPr lang="en-US" sz="5061" b="0" strike="noStrike" spc="-1">
               <a:latin typeface="Arial"/>
             </a:endParaRPr>
           </a:p>
@@ -1259,8 +1259,8 @@
         </p:nvSpPr>
         <p:spPr>
           <a:xfrm>
-            <a:off x="317509" y="566042"/>
-            <a:ext cx="5714748" cy="1403096"/>
+            <a:off x="240989" y="1127627"/>
+            <a:ext cx="4337494" cy="2795144"/>
           </a:xfrm>
           <a:prstGeom prst="rect">
             <a:avLst/>
@@ -1315,8 +1315,8 @@
         </p:nvSpPr>
         <p:spPr>
           <a:xfrm>
-            <a:off x="317509" y="96522"/>
-            <a:ext cx="5714748" cy="403860"/>
+            <a:off x="240989" y="192284"/>
+            <a:ext cx="4337494" cy="804540"/>
           </a:xfrm>
           <a:prstGeom prst="rect">
             <a:avLst/>
@@ -1327,7 +1327,7 @@
           <a:lstStyle/>
           <a:p>
             <a:pPr algn="ctr"/>
-            <a:endParaRPr lang="en-US" sz="5060" b="0" strike="noStrike" spc="-1">
+            <a:endParaRPr lang="en-US" sz="5061" b="0" strike="noStrike" spc="-1">
               <a:latin typeface="Arial"/>
             </a:endParaRPr>
           </a:p>
@@ -1345,8 +1345,8 @@
         </p:nvSpPr>
         <p:spPr>
           <a:xfrm>
-            <a:off x="317504" y="566042"/>
-            <a:ext cx="2788753" cy="1403096"/>
+            <a:off x="240988" y="1127627"/>
+            <a:ext cx="2116664" cy="2795144"/>
           </a:xfrm>
           <a:prstGeom prst="rect">
             <a:avLst/>
@@ -1376,8 +1376,8 @@
         </p:nvSpPr>
         <p:spPr>
           <a:xfrm>
-            <a:off x="3246006" y="566042"/>
-            <a:ext cx="2788753" cy="1403096"/>
+            <a:off x="2463722" y="1127627"/>
+            <a:ext cx="2116664" cy="2795144"/>
           </a:xfrm>
           <a:prstGeom prst="rect">
             <a:avLst/>
@@ -1432,8 +1432,8 @@
         </p:nvSpPr>
         <p:spPr>
           <a:xfrm>
-            <a:off x="317509" y="96522"/>
-            <a:ext cx="5714748" cy="403860"/>
+            <a:off x="240989" y="192284"/>
+            <a:ext cx="4337494" cy="804540"/>
           </a:xfrm>
           <a:prstGeom prst="rect">
             <a:avLst/>
@@ -1444,7 +1444,7 @@
           <a:lstStyle/>
           <a:p>
             <a:pPr algn="ctr"/>
-            <a:endParaRPr lang="en-US" sz="5060" b="0" strike="noStrike" spc="-1">
+            <a:endParaRPr lang="en-US" sz="5061" b="0" strike="noStrike" spc="-1">
               <a:latin typeface="Arial"/>
             </a:endParaRPr>
           </a:p>
@@ -1487,8 +1487,8 @@
         </p:nvSpPr>
         <p:spPr>
           <a:xfrm>
-            <a:off x="317509" y="96522"/>
-            <a:ext cx="5714748" cy="1872488"/>
+            <a:off x="240989" y="192286"/>
+            <a:ext cx="4337494" cy="3730232"/>
           </a:xfrm>
           <a:prstGeom prst="rect">
             <a:avLst/>
@@ -1542,8 +1542,8 @@
         </p:nvSpPr>
         <p:spPr>
           <a:xfrm>
-            <a:off x="317509" y="96522"/>
-            <a:ext cx="5714748" cy="403860"/>
+            <a:off x="240989" y="192284"/>
+            <a:ext cx="4337494" cy="804540"/>
           </a:xfrm>
           <a:prstGeom prst="rect">
             <a:avLst/>
@@ -1554,7 +1554,7 @@
           <a:lstStyle/>
           <a:p>
             <a:pPr algn="ctr"/>
-            <a:endParaRPr lang="en-US" sz="5060" b="0" strike="noStrike" spc="-1">
+            <a:endParaRPr lang="en-US" sz="5061" b="0" strike="noStrike" spc="-1">
               <a:latin typeface="Arial"/>
             </a:endParaRPr>
           </a:p>
@@ -1572,8 +1572,8 @@
         </p:nvSpPr>
         <p:spPr>
           <a:xfrm>
-            <a:off x="317504" y="566045"/>
-            <a:ext cx="2788753" cy="669163"/>
+            <a:off x="240988" y="1127639"/>
+            <a:ext cx="2116664" cy="1333057"/>
           </a:xfrm>
           <a:prstGeom prst="rect">
             <a:avLst/>
@@ -1603,8 +1603,8 @@
         </p:nvSpPr>
         <p:spPr>
           <a:xfrm>
-            <a:off x="3246006" y="566042"/>
-            <a:ext cx="2788753" cy="1403096"/>
+            <a:off x="2463722" y="1127627"/>
+            <a:ext cx="2116664" cy="2795144"/>
           </a:xfrm>
           <a:prstGeom prst="rect">
             <a:avLst/>
@@ -1634,8 +1634,8 @@
         </p:nvSpPr>
         <p:spPr>
           <a:xfrm>
-            <a:off x="317504" y="1298961"/>
-            <a:ext cx="2788753" cy="669163"/>
+            <a:off x="240988" y="2587700"/>
+            <a:ext cx="2116664" cy="1333057"/>
           </a:xfrm>
           <a:prstGeom prst="rect">
             <a:avLst/>
@@ -1690,8 +1690,8 @@
         </p:nvSpPr>
         <p:spPr>
           <a:xfrm>
-            <a:off x="317509" y="96522"/>
-            <a:ext cx="5714748" cy="403860"/>
+            <a:off x="240989" y="192284"/>
+            <a:ext cx="4337494" cy="804540"/>
           </a:xfrm>
           <a:prstGeom prst="rect">
             <a:avLst/>
@@ -1702,7 +1702,7 @@
           <a:lstStyle/>
           <a:p>
             <a:pPr algn="ctr"/>
-            <a:endParaRPr lang="en-US" sz="5060" b="0" strike="noStrike" spc="-1">
+            <a:endParaRPr lang="en-US" sz="5061" b="0" strike="noStrike" spc="-1">
               <a:latin typeface="Arial"/>
             </a:endParaRPr>
           </a:p>
@@ -1720,8 +1720,8 @@
         </p:nvSpPr>
         <p:spPr>
           <a:xfrm>
-            <a:off x="317504" y="566042"/>
-            <a:ext cx="2788753" cy="1403096"/>
+            <a:off x="240988" y="1127627"/>
+            <a:ext cx="2116664" cy="2795144"/>
           </a:xfrm>
           <a:prstGeom prst="rect">
             <a:avLst/>
@@ -1751,8 +1751,8 @@
         </p:nvSpPr>
         <p:spPr>
           <a:xfrm>
-            <a:off x="3246006" y="566045"/>
-            <a:ext cx="2788753" cy="669163"/>
+            <a:off x="2463722" y="1127639"/>
+            <a:ext cx="2116664" cy="1333057"/>
           </a:xfrm>
           <a:prstGeom prst="rect">
             <a:avLst/>
@@ -1782,8 +1782,8 @@
         </p:nvSpPr>
         <p:spPr>
           <a:xfrm>
-            <a:off x="3246006" y="1298961"/>
-            <a:ext cx="2788753" cy="669163"/>
+            <a:off x="2463722" y="2587700"/>
+            <a:ext cx="2116664" cy="1333057"/>
           </a:xfrm>
           <a:prstGeom prst="rect">
             <a:avLst/>
@@ -1838,8 +1838,8 @@
         </p:nvSpPr>
         <p:spPr>
           <a:xfrm>
-            <a:off x="317509" y="96522"/>
-            <a:ext cx="5714748" cy="403860"/>
+            <a:off x="240989" y="192284"/>
+            <a:ext cx="4337494" cy="804540"/>
           </a:xfrm>
           <a:prstGeom prst="rect">
             <a:avLst/>
@@ -1850,7 +1850,7 @@
           <a:lstStyle/>
           <a:p>
             <a:pPr algn="ctr"/>
-            <a:endParaRPr lang="en-US" sz="5060" b="0" strike="noStrike" spc="-1">
+            <a:endParaRPr lang="en-US" sz="5061" b="0" strike="noStrike" spc="-1">
               <a:latin typeface="Arial"/>
             </a:endParaRPr>
           </a:p>
@@ -1868,8 +1868,8 @@
         </p:nvSpPr>
         <p:spPr>
           <a:xfrm>
-            <a:off x="317504" y="566045"/>
-            <a:ext cx="2788753" cy="669163"/>
+            <a:off x="240988" y="1127639"/>
+            <a:ext cx="2116664" cy="1333057"/>
           </a:xfrm>
           <a:prstGeom prst="rect">
             <a:avLst/>
@@ -1899,8 +1899,8 @@
         </p:nvSpPr>
         <p:spPr>
           <a:xfrm>
-            <a:off x="3246006" y="566045"/>
-            <a:ext cx="2788753" cy="669163"/>
+            <a:off x="2463722" y="1127639"/>
+            <a:ext cx="2116664" cy="1333057"/>
           </a:xfrm>
           <a:prstGeom prst="rect">
             <a:avLst/>
@@ -1930,8 +1930,8 @@
         </p:nvSpPr>
         <p:spPr>
           <a:xfrm>
-            <a:off x="317509" y="1298961"/>
-            <a:ext cx="5714748" cy="669163"/>
+            <a:off x="240989" y="2587700"/>
+            <a:ext cx="4337494" cy="1333057"/>
           </a:xfrm>
           <a:prstGeom prst="rect">
             <a:avLst/>
@@ -1990,8 +1990,8 @@
         </p:nvSpPr>
         <p:spPr>
           <a:xfrm>
-            <a:off x="6" y="0"/>
-            <a:ext cx="100000" cy="2419350"/>
+            <a:off x="5" y="0"/>
+            <a:ext cx="75900" cy="4819650"/>
           </a:xfrm>
           <a:prstGeom prst="rect">
             <a:avLst/>
@@ -2024,8 +2024,8 @@
         </p:nvSpPr>
         <p:spPr>
           <a:xfrm>
-            <a:off x="6" y="3"/>
-            <a:ext cx="100000" cy="422783"/>
+            <a:off x="5" y="12"/>
+            <a:ext cx="75900" cy="842237"/>
           </a:xfrm>
           <a:prstGeom prst="rect">
             <a:avLst/>
@@ -2069,7 +2069,7 @@
   </p:sldLayoutIdLst>
   <p:txStyles>
     <p:titleStyle>
-      <a:lvl1pPr algn="l" defTabSz="1051469" rtl="0" eaLnBrk="1" latinLnBrk="1" hangingPunct="1">
+      <a:lvl1pPr algn="l" defTabSz="1051432" rtl="0" eaLnBrk="1" latinLnBrk="1" hangingPunct="1">
         <a:lnSpc>
           <a:spcPct val="90000"/>
         </a:lnSpc>
@@ -2077,7 +2077,7 @@
           <a:spcPct val="0"/>
         </a:spcBef>
         <a:buNone/>
-        <a:defRPr sz="5060" kern="1200">
+        <a:defRPr sz="5061" kern="1200">
           <a:solidFill>
             <a:schemeClr val="tx1"/>
           </a:solidFill>
@@ -2088,7 +2088,7 @@
       </a:lvl1pPr>
     </p:titleStyle>
     <p:bodyStyle>
-      <a:lvl1pPr marL="262867" indent="-262867" algn="l" defTabSz="1051469" rtl="0" eaLnBrk="1" latinLnBrk="1" hangingPunct="1">
+      <a:lvl1pPr marL="262857" indent="-262857" algn="l" defTabSz="1051432" rtl="0" eaLnBrk="1" latinLnBrk="1" hangingPunct="1">
         <a:lnSpc>
           <a:spcPct val="90000"/>
         </a:lnSpc>
@@ -2106,12 +2106,12 @@
           <a:cs typeface="+mn-cs"/>
         </a:defRPr>
       </a:lvl1pPr>
-      <a:lvl2pPr marL="788601" indent="-262867" algn="l" defTabSz="1051469" rtl="0" eaLnBrk="1" latinLnBrk="1" hangingPunct="1">
+      <a:lvl2pPr marL="788574" indent="-262857" algn="l" defTabSz="1051432" rtl="0" eaLnBrk="1" latinLnBrk="1" hangingPunct="1">
         <a:lnSpc>
           <a:spcPct val="90000"/>
         </a:lnSpc>
         <a:spcBef>
-          <a:spcPts val="575"/>
+          <a:spcPts val="574"/>
         </a:spcBef>
         <a:buFont typeface="Arial" panose="020B0604020202020204" pitchFamily="34" charset="0"/>
         <a:buChar char="•"/>
@@ -2124,12 +2124,12 @@
           <a:cs typeface="+mn-cs"/>
         </a:defRPr>
       </a:lvl2pPr>
-      <a:lvl3pPr marL="1314336" indent="-262867" algn="l" defTabSz="1051469" rtl="0" eaLnBrk="1" latinLnBrk="1" hangingPunct="1">
+      <a:lvl3pPr marL="1314291" indent="-262857" algn="l" defTabSz="1051432" rtl="0" eaLnBrk="1" latinLnBrk="1" hangingPunct="1">
         <a:lnSpc>
           <a:spcPct val="90000"/>
         </a:lnSpc>
         <a:spcBef>
-          <a:spcPts val="575"/>
+          <a:spcPts val="574"/>
         </a:spcBef>
         <a:buFont typeface="Arial" panose="020B0604020202020204" pitchFamily="34" charset="0"/>
         <a:buChar char="•"/>
@@ -2142,12 +2142,12 @@
           <a:cs typeface="+mn-cs"/>
         </a:defRPr>
       </a:lvl3pPr>
-      <a:lvl4pPr marL="1840070" indent="-262867" algn="l" defTabSz="1051469" rtl="0" eaLnBrk="1" latinLnBrk="1" hangingPunct="1">
+      <a:lvl4pPr marL="1840006" indent="-262857" algn="l" defTabSz="1051432" rtl="0" eaLnBrk="1" latinLnBrk="1" hangingPunct="1">
         <a:lnSpc>
           <a:spcPct val="90000"/>
         </a:lnSpc>
         <a:spcBef>
-          <a:spcPts val="575"/>
+          <a:spcPts val="574"/>
         </a:spcBef>
         <a:buFont typeface="Arial" panose="020B0604020202020204" pitchFamily="34" charset="0"/>
         <a:buChar char="•"/>
@@ -2160,12 +2160,12 @@
           <a:cs typeface="+mn-cs"/>
         </a:defRPr>
       </a:lvl4pPr>
-      <a:lvl5pPr marL="2365804" indent="-262867" algn="l" defTabSz="1051469" rtl="0" eaLnBrk="1" latinLnBrk="1" hangingPunct="1">
+      <a:lvl5pPr marL="2365720" indent="-262857" algn="l" defTabSz="1051432" rtl="0" eaLnBrk="1" latinLnBrk="1" hangingPunct="1">
         <a:lnSpc>
           <a:spcPct val="90000"/>
         </a:lnSpc>
         <a:spcBef>
-          <a:spcPts val="575"/>
+          <a:spcPts val="574"/>
         </a:spcBef>
         <a:buFont typeface="Arial" panose="020B0604020202020204" pitchFamily="34" charset="0"/>
         <a:buChar char="•"/>
@@ -2178,12 +2178,12 @@
           <a:cs typeface="+mn-cs"/>
         </a:defRPr>
       </a:lvl5pPr>
-      <a:lvl6pPr marL="2891539" indent="-262867" algn="l" defTabSz="1051469" rtl="0" eaLnBrk="1" latinLnBrk="1" hangingPunct="1">
+      <a:lvl6pPr marL="2891437" indent="-262857" algn="l" defTabSz="1051432" rtl="0" eaLnBrk="1" latinLnBrk="1" hangingPunct="1">
         <a:lnSpc>
           <a:spcPct val="90000"/>
         </a:lnSpc>
         <a:spcBef>
-          <a:spcPts val="575"/>
+          <a:spcPts val="574"/>
         </a:spcBef>
         <a:buFont typeface="Arial" panose="020B0604020202020204" pitchFamily="34" charset="0"/>
         <a:buChar char="•"/>
@@ -2196,12 +2196,12 @@
           <a:cs typeface="+mn-cs"/>
         </a:defRPr>
       </a:lvl6pPr>
-      <a:lvl7pPr marL="3417273" indent="-262867" algn="l" defTabSz="1051469" rtl="0" eaLnBrk="1" latinLnBrk="1" hangingPunct="1">
+      <a:lvl7pPr marL="3417154" indent="-262857" algn="l" defTabSz="1051432" rtl="0" eaLnBrk="1" latinLnBrk="1" hangingPunct="1">
         <a:lnSpc>
           <a:spcPct val="90000"/>
         </a:lnSpc>
         <a:spcBef>
-          <a:spcPts val="575"/>
+          <a:spcPts val="574"/>
         </a:spcBef>
         <a:buFont typeface="Arial" panose="020B0604020202020204" pitchFamily="34" charset="0"/>
         <a:buChar char="•"/>
@@ -2214,12 +2214,12 @@
           <a:cs typeface="+mn-cs"/>
         </a:defRPr>
       </a:lvl7pPr>
-      <a:lvl8pPr marL="3943007" indent="-262867" algn="l" defTabSz="1051469" rtl="0" eaLnBrk="1" latinLnBrk="1" hangingPunct="1">
+      <a:lvl8pPr marL="3942869" indent="-262857" algn="l" defTabSz="1051432" rtl="0" eaLnBrk="1" latinLnBrk="1" hangingPunct="1">
         <a:lnSpc>
           <a:spcPct val="90000"/>
         </a:lnSpc>
         <a:spcBef>
-          <a:spcPts val="575"/>
+          <a:spcPts val="574"/>
         </a:spcBef>
         <a:buFont typeface="Arial" panose="020B0604020202020204" pitchFamily="34" charset="0"/>
         <a:buChar char="•"/>
@@ -2232,12 +2232,12 @@
           <a:cs typeface="+mn-cs"/>
         </a:defRPr>
       </a:lvl8pPr>
-      <a:lvl9pPr marL="4468741" indent="-262867" algn="l" defTabSz="1051469" rtl="0" eaLnBrk="1" latinLnBrk="1" hangingPunct="1">
+      <a:lvl9pPr marL="4468583" indent="-262857" algn="l" defTabSz="1051432" rtl="0" eaLnBrk="1" latinLnBrk="1" hangingPunct="1">
         <a:lnSpc>
           <a:spcPct val="90000"/>
         </a:lnSpc>
         <a:spcBef>
-          <a:spcPts val="575"/>
+          <a:spcPts val="574"/>
         </a:spcBef>
         <a:buFont typeface="Arial" panose="020B0604020202020204" pitchFamily="34" charset="0"/>
         <a:buChar char="•"/>
@@ -2255,7 +2255,7 @@
       <a:defPPr>
         <a:defRPr lang="ko-KR"/>
       </a:defPPr>
-      <a:lvl1pPr marL="0" algn="l" defTabSz="1051469" rtl="0" eaLnBrk="1" latinLnBrk="1" hangingPunct="1">
+      <a:lvl1pPr marL="0" algn="l" defTabSz="1051432" rtl="0" eaLnBrk="1" latinLnBrk="1" hangingPunct="1">
         <a:defRPr sz="2070" kern="1200">
           <a:solidFill>
             <a:schemeClr val="tx1"/>
@@ -2265,7 +2265,7 @@
           <a:cs typeface="+mn-cs"/>
         </a:defRPr>
       </a:lvl1pPr>
-      <a:lvl2pPr marL="525734" algn="l" defTabSz="1051469" rtl="0" eaLnBrk="1" latinLnBrk="1" hangingPunct="1">
+      <a:lvl2pPr marL="525715" algn="l" defTabSz="1051432" rtl="0" eaLnBrk="1" latinLnBrk="1" hangingPunct="1">
         <a:defRPr sz="2070" kern="1200">
           <a:solidFill>
             <a:schemeClr val="tx1"/>
@@ -2275,7 +2275,7 @@
           <a:cs typeface="+mn-cs"/>
         </a:defRPr>
       </a:lvl2pPr>
-      <a:lvl3pPr marL="1051469" algn="l" defTabSz="1051469" rtl="0" eaLnBrk="1" latinLnBrk="1" hangingPunct="1">
+      <a:lvl3pPr marL="1051432" algn="l" defTabSz="1051432" rtl="0" eaLnBrk="1" latinLnBrk="1" hangingPunct="1">
         <a:defRPr sz="2070" kern="1200">
           <a:solidFill>
             <a:schemeClr val="tx1"/>
@@ -2285,7 +2285,7 @@
           <a:cs typeface="+mn-cs"/>
         </a:defRPr>
       </a:lvl3pPr>
-      <a:lvl4pPr marL="1577203" algn="l" defTabSz="1051469" rtl="0" eaLnBrk="1" latinLnBrk="1" hangingPunct="1">
+      <a:lvl4pPr marL="1577148" algn="l" defTabSz="1051432" rtl="0" eaLnBrk="1" latinLnBrk="1" hangingPunct="1">
         <a:defRPr sz="2070" kern="1200">
           <a:solidFill>
             <a:schemeClr val="tx1"/>
@@ -2295,7 +2295,7 @@
           <a:cs typeface="+mn-cs"/>
         </a:defRPr>
       </a:lvl4pPr>
-      <a:lvl5pPr marL="2102937" algn="l" defTabSz="1051469" rtl="0" eaLnBrk="1" latinLnBrk="1" hangingPunct="1">
+      <a:lvl5pPr marL="2102863" algn="l" defTabSz="1051432" rtl="0" eaLnBrk="1" latinLnBrk="1" hangingPunct="1">
         <a:defRPr sz="2070" kern="1200">
           <a:solidFill>
             <a:schemeClr val="tx1"/>
@@ -2305,7 +2305,7 @@
           <a:cs typeface="+mn-cs"/>
         </a:defRPr>
       </a:lvl5pPr>
-      <a:lvl6pPr marL="2628671" algn="l" defTabSz="1051469" rtl="0" eaLnBrk="1" latinLnBrk="1" hangingPunct="1">
+      <a:lvl6pPr marL="2628579" algn="l" defTabSz="1051432" rtl="0" eaLnBrk="1" latinLnBrk="1" hangingPunct="1">
         <a:defRPr sz="2070" kern="1200">
           <a:solidFill>
             <a:schemeClr val="tx1"/>
@@ -2315,7 +2315,7 @@
           <a:cs typeface="+mn-cs"/>
         </a:defRPr>
       </a:lvl6pPr>
-      <a:lvl7pPr marL="3154406" algn="l" defTabSz="1051469" rtl="0" eaLnBrk="1" latinLnBrk="1" hangingPunct="1">
+      <a:lvl7pPr marL="3154295" algn="l" defTabSz="1051432" rtl="0" eaLnBrk="1" latinLnBrk="1" hangingPunct="1">
         <a:defRPr sz="2070" kern="1200">
           <a:solidFill>
             <a:schemeClr val="tx1"/>
@@ -2325,7 +2325,7 @@
           <a:cs typeface="+mn-cs"/>
         </a:defRPr>
       </a:lvl7pPr>
-      <a:lvl8pPr marL="3680140" algn="l" defTabSz="1051469" rtl="0" eaLnBrk="1" latinLnBrk="1" hangingPunct="1">
+      <a:lvl8pPr marL="3680011" algn="l" defTabSz="1051432" rtl="0" eaLnBrk="1" latinLnBrk="1" hangingPunct="1">
         <a:defRPr sz="2070" kern="1200">
           <a:solidFill>
             <a:schemeClr val="tx1"/>
@@ -2335,7 +2335,7 @@
           <a:cs typeface="+mn-cs"/>
         </a:defRPr>
       </a:lvl8pPr>
-      <a:lvl9pPr marL="4205874" algn="l" defTabSz="1051469" rtl="0" eaLnBrk="1" latinLnBrk="1" hangingPunct="1">
+      <a:lvl9pPr marL="4205726" algn="l" defTabSz="1051432" rtl="0" eaLnBrk="1" latinLnBrk="1" hangingPunct="1">
         <a:defRPr sz="2070" kern="1200">
           <a:solidFill>
             <a:schemeClr val="tx1"/>
@@ -2367,35 +2367,399 @@
           <a:chExt cx="0" cy="0"/>
         </a:xfrm>
       </p:grpSpPr>
-      <p:pic>
-        <p:nvPicPr>
-          <p:cNvPr id="2" name="Main graphic">
+      <p:grpSp>
+        <p:nvGrpSpPr>
+          <p:cNvPr id="10" name="그룹 9">
             <a:extLst>
               <a:ext uri="{FF2B5EF4-FFF2-40B4-BE49-F238E27FC236}">
-                <a16:creationId xmlns:a16="http://schemas.microsoft.com/office/drawing/2014/main" id="{5ADB8800-3580-5883-4781-0E9317D031D5}"/>
+                <a16:creationId xmlns:a16="http://schemas.microsoft.com/office/drawing/2014/main" id="{771627EF-EC68-6BA1-B9F3-49A0A05DB9EC}"/>
               </a:ext>
             </a:extLst>
           </p:cNvPr>
-          <p:cNvPicPr/>
+          <p:cNvGrpSpPr/>
           <p:nvPr/>
-        </p:nvPicPr>
-        <p:blipFill>
-          <a:blip r:embed="rId3"/>
-          <a:stretch/>
-        </p:blipFill>
-        <p:spPr>
-          <a:xfrm>
-            <a:off x="-40" y="-930"/>
-            <a:ext cx="6350040" cy="2420280"/>
-          </a:xfrm>
-          <a:prstGeom prst="rect">
-            <a:avLst/>
-          </a:prstGeom>
-          <a:ln>
-            <a:noFill/>
-          </a:ln>
-        </p:spPr>
-      </p:pic>
+        </p:nvGrpSpPr>
+        <p:grpSpPr>
+          <a:xfrm>
+            <a:off x="0" y="994"/>
+            <a:ext cx="4818653" cy="4839082"/>
+            <a:chOff x="765673" y="859809"/>
+            <a:chExt cx="4818654" cy="4839082"/>
+          </a:xfrm>
+        </p:grpSpPr>
+        <p:sp>
+          <p:nvSpPr>
+            <p:cNvPr id="4" name="직사각형 3">
+              <a:extLst>
+                <a:ext uri="{FF2B5EF4-FFF2-40B4-BE49-F238E27FC236}">
+                  <a16:creationId xmlns:a16="http://schemas.microsoft.com/office/drawing/2014/main" id="{8D9AFA50-D51D-FE8E-187D-DA086FC20B6E}"/>
+                </a:ext>
+              </a:extLst>
+            </p:cNvPr>
+            <p:cNvSpPr/>
+            <p:nvPr/>
+          </p:nvSpPr>
+          <p:spPr>
+            <a:xfrm>
+              <a:off x="765673" y="859810"/>
+              <a:ext cx="4818654" cy="4818654"/>
+            </a:xfrm>
+            <a:prstGeom prst="rect">
+              <a:avLst/>
+            </a:prstGeom>
+            <a:solidFill>
+              <a:schemeClr val="tx1"/>
+            </a:solidFill>
+            <a:ln>
+              <a:noFill/>
+            </a:ln>
+          </p:spPr>
+          <p:style>
+            <a:lnRef idx="2">
+              <a:schemeClr val="accent1">
+                <a:shade val="15000"/>
+              </a:schemeClr>
+            </a:lnRef>
+            <a:fillRef idx="1">
+              <a:schemeClr val="accent1"/>
+            </a:fillRef>
+            <a:effectRef idx="0">
+              <a:schemeClr val="accent1"/>
+            </a:effectRef>
+            <a:fontRef idx="minor">
+              <a:schemeClr val="lt1"/>
+            </a:fontRef>
+          </p:style>
+          <p:txBody>
+            <a:bodyPr rtlCol="0" anchor="ctr"/>
+            <a:lstStyle/>
+            <a:p>
+              <a:pPr algn="ctr"/>
+              <a:endParaRPr kumimoji="1" lang="ko-Kore-KR" altLang="en-US" sz="769"/>
+            </a:p>
+          </p:txBody>
+        </p:sp>
+        <p:pic>
+          <p:nvPicPr>
+            <p:cNvPr id="2" name="Main graphic">
+              <a:extLst>
+                <a:ext uri="{FF2B5EF4-FFF2-40B4-BE49-F238E27FC236}">
+                  <a16:creationId xmlns:a16="http://schemas.microsoft.com/office/drawing/2014/main" id="{5ADB8800-3580-5883-4781-0E9317D031D5}"/>
+                </a:ext>
+              </a:extLst>
+            </p:cNvPr>
+            <p:cNvPicPr/>
+            <p:nvPr/>
+          </p:nvPicPr>
+          <p:blipFill rotWithShape="1">
+            <a:blip r:embed="rId3"/>
+            <a:srcRect r="33760"/>
+            <a:stretch/>
+          </p:blipFill>
+          <p:spPr>
+            <a:xfrm>
+              <a:off x="1071840" y="917915"/>
+              <a:ext cx="4206280" cy="2420280"/>
+            </a:xfrm>
+            <a:prstGeom prst="rect">
+              <a:avLst/>
+            </a:prstGeom>
+            <a:ln>
+              <a:noFill/>
+            </a:ln>
+          </p:spPr>
+        </p:pic>
+        <p:pic>
+          <p:nvPicPr>
+            <p:cNvPr id="3" name="Main graphic">
+              <a:extLst>
+                <a:ext uri="{FF2B5EF4-FFF2-40B4-BE49-F238E27FC236}">
+                  <a16:creationId xmlns:a16="http://schemas.microsoft.com/office/drawing/2014/main" id="{2B0D6D3E-ED91-8B35-B70B-0D1F9F8F60CF}"/>
+                </a:ext>
+              </a:extLst>
+            </p:cNvPr>
+            <p:cNvPicPr/>
+            <p:nvPr/>
+          </p:nvPicPr>
+          <p:blipFill rotWithShape="1">
+            <a:blip r:embed="rId3"/>
+            <a:srcRect l="66239" t="1863"/>
+            <a:stretch/>
+          </p:blipFill>
+          <p:spPr>
+            <a:xfrm>
+              <a:off x="2103080" y="3303269"/>
+              <a:ext cx="2143800" cy="2375195"/>
+            </a:xfrm>
+            <a:prstGeom prst="rect">
+              <a:avLst/>
+            </a:prstGeom>
+            <a:ln>
+              <a:noFill/>
+            </a:ln>
+          </p:spPr>
+        </p:pic>
+        <p:sp>
+          <p:nvSpPr>
+            <p:cNvPr id="5" name="직사각형 4">
+              <a:extLst>
+                <a:ext uri="{FF2B5EF4-FFF2-40B4-BE49-F238E27FC236}">
+                  <a16:creationId xmlns:a16="http://schemas.microsoft.com/office/drawing/2014/main" id="{904592F8-3A72-3EA1-C80B-0EAD878A4623}"/>
+                </a:ext>
+              </a:extLst>
+            </p:cNvPr>
+            <p:cNvSpPr/>
+            <p:nvPr/>
+          </p:nvSpPr>
+          <p:spPr>
+            <a:xfrm>
+              <a:off x="4165600" y="3303269"/>
+              <a:ext cx="1418688" cy="2375196"/>
+            </a:xfrm>
+            <a:prstGeom prst="rect">
+              <a:avLst/>
+            </a:prstGeom>
+            <a:solidFill>
+              <a:schemeClr val="tx1"/>
+            </a:solidFill>
+            <a:ln>
+              <a:noFill/>
+            </a:ln>
+          </p:spPr>
+          <p:style>
+            <a:lnRef idx="2">
+              <a:schemeClr val="accent1">
+                <a:shade val="15000"/>
+              </a:schemeClr>
+            </a:lnRef>
+            <a:fillRef idx="1">
+              <a:schemeClr val="accent1"/>
+            </a:fillRef>
+            <a:effectRef idx="0">
+              <a:schemeClr val="accent1"/>
+            </a:effectRef>
+            <a:fontRef idx="minor">
+              <a:schemeClr val="lt1"/>
+            </a:fontRef>
+          </p:style>
+          <p:txBody>
+            <a:bodyPr rtlCol="0" anchor="ctr"/>
+            <a:lstStyle/>
+            <a:p>
+              <a:pPr algn="ctr"/>
+              <a:endParaRPr kumimoji="1" lang="ko-Kore-KR" altLang="en-US" sz="769"/>
+            </a:p>
+          </p:txBody>
+        </p:sp>
+        <p:sp>
+          <p:nvSpPr>
+            <p:cNvPr id="6" name="직사각형 5">
+              <a:extLst>
+                <a:ext uri="{FF2B5EF4-FFF2-40B4-BE49-F238E27FC236}">
+                  <a16:creationId xmlns:a16="http://schemas.microsoft.com/office/drawing/2014/main" id="{EC357D88-E178-E609-6388-5C766A459168}"/>
+                </a:ext>
+              </a:extLst>
+            </p:cNvPr>
+            <p:cNvSpPr/>
+            <p:nvPr/>
+          </p:nvSpPr>
+          <p:spPr>
+            <a:xfrm>
+              <a:off x="992012" y="859809"/>
+              <a:ext cx="4356502" cy="103191"/>
+            </a:xfrm>
+            <a:prstGeom prst="rect">
+              <a:avLst/>
+            </a:prstGeom>
+            <a:solidFill>
+              <a:schemeClr val="tx1"/>
+            </a:solidFill>
+            <a:ln>
+              <a:noFill/>
+            </a:ln>
+          </p:spPr>
+          <p:style>
+            <a:lnRef idx="2">
+              <a:schemeClr val="accent1">
+                <a:shade val="15000"/>
+              </a:schemeClr>
+            </a:lnRef>
+            <a:fillRef idx="1">
+              <a:schemeClr val="accent1"/>
+            </a:fillRef>
+            <a:effectRef idx="0">
+              <a:schemeClr val="accent1"/>
+            </a:effectRef>
+            <a:fontRef idx="minor">
+              <a:schemeClr val="lt1"/>
+            </a:fontRef>
+          </p:style>
+          <p:txBody>
+            <a:bodyPr rtlCol="0" anchor="ctr"/>
+            <a:lstStyle/>
+            <a:p>
+              <a:pPr algn="ctr"/>
+              <a:endParaRPr kumimoji="1" lang="ko-Kore-KR" altLang="en-US" sz="769"/>
+            </a:p>
+          </p:txBody>
+        </p:sp>
+        <p:sp>
+          <p:nvSpPr>
+            <p:cNvPr id="7" name="직사각형 6">
+              <a:extLst>
+                <a:ext uri="{FF2B5EF4-FFF2-40B4-BE49-F238E27FC236}">
+                  <a16:creationId xmlns:a16="http://schemas.microsoft.com/office/drawing/2014/main" id="{F29C3A8B-A40E-5145-9A54-EB06D6F63266}"/>
+                </a:ext>
+              </a:extLst>
+            </p:cNvPr>
+            <p:cNvSpPr/>
+            <p:nvPr/>
+          </p:nvSpPr>
+          <p:spPr>
+            <a:xfrm>
+              <a:off x="964375" y="859809"/>
+              <a:ext cx="203240" cy="2543791"/>
+            </a:xfrm>
+            <a:prstGeom prst="rect">
+              <a:avLst/>
+            </a:prstGeom>
+            <a:solidFill>
+              <a:schemeClr val="tx1"/>
+            </a:solidFill>
+            <a:ln>
+              <a:noFill/>
+            </a:ln>
+          </p:spPr>
+          <p:style>
+            <a:lnRef idx="2">
+              <a:schemeClr val="accent1">
+                <a:shade val="15000"/>
+              </a:schemeClr>
+            </a:lnRef>
+            <a:fillRef idx="1">
+              <a:schemeClr val="accent1"/>
+            </a:fillRef>
+            <a:effectRef idx="0">
+              <a:schemeClr val="accent1"/>
+            </a:effectRef>
+            <a:fontRef idx="minor">
+              <a:schemeClr val="lt1"/>
+            </a:fontRef>
+          </p:style>
+          <p:txBody>
+            <a:bodyPr rtlCol="0" anchor="ctr"/>
+            <a:lstStyle/>
+            <a:p>
+              <a:pPr algn="ctr"/>
+              <a:endParaRPr kumimoji="1" lang="ko-Kore-KR" altLang="en-US" sz="769"/>
+            </a:p>
+          </p:txBody>
+        </p:sp>
+        <p:sp>
+          <p:nvSpPr>
+            <p:cNvPr id="8" name="직사각형 7">
+              <a:extLst>
+                <a:ext uri="{FF2B5EF4-FFF2-40B4-BE49-F238E27FC236}">
+                  <a16:creationId xmlns:a16="http://schemas.microsoft.com/office/drawing/2014/main" id="{B60FD92F-0073-126E-6E04-2FBDAB967D6D}"/>
+                </a:ext>
+              </a:extLst>
+            </p:cNvPr>
+            <p:cNvSpPr/>
+            <p:nvPr/>
+          </p:nvSpPr>
+          <p:spPr>
+            <a:xfrm>
+              <a:off x="1057246" y="3289264"/>
+              <a:ext cx="1045834" cy="294077"/>
+            </a:xfrm>
+            <a:prstGeom prst="rect">
+              <a:avLst/>
+            </a:prstGeom>
+            <a:solidFill>
+              <a:schemeClr val="tx1"/>
+            </a:solidFill>
+            <a:ln>
+              <a:noFill/>
+            </a:ln>
+          </p:spPr>
+          <p:style>
+            <a:lnRef idx="2">
+              <a:schemeClr val="accent1">
+                <a:shade val="15000"/>
+              </a:schemeClr>
+            </a:lnRef>
+            <a:fillRef idx="1">
+              <a:schemeClr val="accent1"/>
+            </a:fillRef>
+            <a:effectRef idx="0">
+              <a:schemeClr val="accent1"/>
+            </a:effectRef>
+            <a:fontRef idx="minor">
+              <a:schemeClr val="lt1"/>
+            </a:fontRef>
+          </p:style>
+          <p:txBody>
+            <a:bodyPr rtlCol="0" anchor="ctr"/>
+            <a:lstStyle/>
+            <a:p>
+              <a:pPr algn="ctr"/>
+              <a:endParaRPr kumimoji="1" lang="ko-Kore-KR" altLang="en-US" sz="769"/>
+            </a:p>
+          </p:txBody>
+        </p:sp>
+        <p:sp>
+          <p:nvSpPr>
+            <p:cNvPr id="9" name="직사각형 8">
+              <a:extLst>
+                <a:ext uri="{FF2B5EF4-FFF2-40B4-BE49-F238E27FC236}">
+                  <a16:creationId xmlns:a16="http://schemas.microsoft.com/office/drawing/2014/main" id="{0EC39337-16CA-AE5E-DFFA-69B38BB99506}"/>
+                </a:ext>
+              </a:extLst>
+            </p:cNvPr>
+            <p:cNvSpPr/>
+            <p:nvPr/>
+          </p:nvSpPr>
+          <p:spPr>
+            <a:xfrm>
+              <a:off x="1376600" y="5640834"/>
+              <a:ext cx="3587325" cy="58057"/>
+            </a:xfrm>
+            <a:prstGeom prst="rect">
+              <a:avLst/>
+            </a:prstGeom>
+            <a:solidFill>
+              <a:schemeClr val="tx1"/>
+            </a:solidFill>
+            <a:ln>
+              <a:noFill/>
+            </a:ln>
+          </p:spPr>
+          <p:style>
+            <a:lnRef idx="2">
+              <a:schemeClr val="accent1">
+                <a:shade val="15000"/>
+              </a:schemeClr>
+            </a:lnRef>
+            <a:fillRef idx="1">
+              <a:schemeClr val="accent1"/>
+            </a:fillRef>
+            <a:effectRef idx="0">
+              <a:schemeClr val="accent1"/>
+            </a:effectRef>
+            <a:fontRef idx="minor">
+              <a:schemeClr val="lt1"/>
+            </a:fontRef>
+          </p:style>
+          <p:txBody>
+            <a:bodyPr rtlCol="0" anchor="ctr"/>
+            <a:lstStyle/>
+            <a:p>
+              <a:pPr algn="ctr"/>
+              <a:endParaRPr kumimoji="1" lang="ko-Kore-KR" altLang="en-US" sz="769"/>
+            </a:p>
+          </p:txBody>
+        </p:sp>
+      </p:grpSp>
     </p:spTree>
     <p:extLst>
       <p:ext uri="{BB962C8B-B14F-4D97-AF65-F5344CB8AC3E}">
